--- a/production/entregables/Meridiano_OnePager_Frio.pptx
+++ b/production/entregables/Meridiano_OnePager_Frio.pptx
@@ -1877,7 +1877,7 @@
               <a:buNone/>
             </a:pPr>
             <a:r>
-              <a:rPr lang="en-US" sz="1100" b="1" dirty="0">
+              <a:rPr lang="en-US" sz="1100" dirty="0">
                 <a:solidFill>
                   <a:srgbClr val="F3EDE3"/>
                 </a:solidFill>
